--- a/neerlandais1/powerpoints/Module_31_De_keuken_in.pptx
+++ b/neerlandais1/powerpoints/Module_31_De_keuken_in.pptx
@@ -136,18 +136,18 @@
   <p:extLst>
     <p:ext uri="{521415D9-36F7-43E2-AB2F-B90AF26B5E84}">
       <p14:sectionLst xmlns:p14="http://schemas.microsoft.com/office/powerpoint/2010/main">
-        <p14:section name="Ouverture" id="{812ccd9f-8ec3-6656-84b5-31c6de9c21da}">
+        <p14:section name="Ouverture" id="{ba3f9567-d89c-e111-bc9c-45b3d9d6017f}">
           <p14:sldIdLst>
             <p14:sldId id="256"/>
           </p14:sldIdLst>
         </p14:section>
-        <p14:section name="Découvrir" id="{69690840-17c0-6d88-39b2-2c575d444d8d}">
+        <p14:section name="Découvrir" id="{fc6dd6fe-0067-c636-58f4-32a082783b51}">
           <p14:sldIdLst>
             <p14:sldId id="257"/>
             <p14:sldId id="258"/>
           </p14:sldIdLst>
         </p14:section>
-        <p14:section name="Comprendre" id="{5ec45369-af86-4f48-002b-4a6011a1a547}">
+        <p14:section name="Comprendre" id="{977082ec-1263-6707-f3c5-de789c707243}">
           <p14:sldIdLst>
             <p14:sldId id="259"/>
             <p14:sldId id="260"/>
@@ -164,7 +164,7 @@
             <p14:sldId id="271"/>
           </p14:sldIdLst>
         </p14:section>
-        <p14:section name="JIJ NU ! — Oefeningen" id="{07dc13dc-5f4b-ce4c-06d7-2a0f4a1bd3de}">
+        <p14:section name="JIJ NU ! — Oefeningen" id="{e4e47306-a635-526f-3ef0-106447dc4415}">
           <p14:sldIdLst>
             <p14:sldId id="272"/>
             <p14:sldId id="273"/>
@@ -181,7 +181,7 @@
             <p14:sldId id="284"/>
           </p14:sldIdLst>
         </p14:section>
-        <p14:section name="Clôture" id="{21522feb-e88a-3b2e-28d6-f58bf3cd2375}">
+        <p14:section name="Clôture" id="{5be62179-d20a-688e-8f53-4544153f4d54}">
           <p14:sldIdLst>
             <p14:sldId id="285"/>
           </p14:sldIdLst>

--- a/neerlandais1/powerpoints/Module_31_De_keuken_in.pptx
+++ b/neerlandais1/powerpoints/Module_31_De_keuken_in.pptx
@@ -136,18 +136,18 @@
   <p:extLst>
     <p:ext uri="{521415D9-36F7-43E2-AB2F-B90AF26B5E84}">
       <p14:sectionLst xmlns:p14="http://schemas.microsoft.com/office/powerpoint/2010/main">
-        <p14:section name="Ouverture" id="{ba3f9567-d89c-e111-bc9c-45b3d9d6017f}">
+        <p14:section name="Ouverture" id="{f726ad15-35ce-4e47-c0f9-e250b6c21b7e}">
           <p14:sldIdLst>
             <p14:sldId id="256"/>
           </p14:sldIdLst>
         </p14:section>
-        <p14:section name="Découvrir" id="{fc6dd6fe-0067-c636-58f4-32a082783b51}">
+        <p14:section name="Découvrir" id="{0160c881-06ac-77ca-97ee-4247938b7e5c}">
           <p14:sldIdLst>
             <p14:sldId id="257"/>
             <p14:sldId id="258"/>
           </p14:sldIdLst>
         </p14:section>
-        <p14:section name="Comprendre" id="{977082ec-1263-6707-f3c5-de789c707243}">
+        <p14:section name="Comprendre" id="{40982ef8-a74f-6963-407d-7b1b9a44b728}">
           <p14:sldIdLst>
             <p14:sldId id="259"/>
             <p14:sldId id="260"/>
@@ -164,7 +164,7 @@
             <p14:sldId id="271"/>
           </p14:sldIdLst>
         </p14:section>
-        <p14:section name="JIJ NU ! — Oefeningen" id="{e4e47306-a635-526f-3ef0-106447dc4415}">
+        <p14:section name="JIJ NU ! — Oefeningen" id="{c665d448-0d9d-c2ac-1178-5d0af89d728f}">
           <p14:sldIdLst>
             <p14:sldId id="272"/>
             <p14:sldId id="273"/>
@@ -181,7 +181,7 @@
             <p14:sldId id="284"/>
           </p14:sldIdLst>
         </p14:section>
-        <p14:section name="Clôture" id="{5be62179-d20a-688e-8f53-4544153f4d54}">
+        <p14:section name="Clôture" id="{4c82b507-64f4-7d22-a2ea-3d17e9402507}">
           <p14:sldIdLst>
             <p14:sldId id="285"/>
           </p14:sldIdLst>

--- a/neerlandais1/powerpoints/Module_31_De_keuken_in.pptx
+++ b/neerlandais1/powerpoints/Module_31_De_keuken_in.pptx
@@ -136,18 +136,18 @@
   <p:extLst>
     <p:ext uri="{521415D9-36F7-43E2-AB2F-B90AF26B5E84}">
       <p14:sectionLst xmlns:p14="http://schemas.microsoft.com/office/powerpoint/2010/main">
-        <p14:section name="Ouverture" id="{f726ad15-35ce-4e47-c0f9-e250b6c21b7e}">
+        <p14:section name="Ouverture" id="{4f88ca8d-e334-7de4-ca5a-009a028dbd99}">
           <p14:sldIdLst>
             <p14:sldId id="256"/>
           </p14:sldIdLst>
         </p14:section>
-        <p14:section name="Découvrir" id="{0160c881-06ac-77ca-97ee-4247938b7e5c}">
+        <p14:section name="Découvrir" id="{fb600aab-53eb-3a89-f76e-2084ab212b56}">
           <p14:sldIdLst>
             <p14:sldId id="257"/>
             <p14:sldId id="258"/>
           </p14:sldIdLst>
         </p14:section>
-        <p14:section name="Comprendre" id="{40982ef8-a74f-6963-407d-7b1b9a44b728}">
+        <p14:section name="Comprendre" id="{6521b9cc-ff1c-9e62-6131-00a104420005}">
           <p14:sldIdLst>
             <p14:sldId id="259"/>
             <p14:sldId id="260"/>
@@ -164,7 +164,7 @@
             <p14:sldId id="271"/>
           </p14:sldIdLst>
         </p14:section>
-        <p14:section name="JIJ NU ! — Oefeningen" id="{c665d448-0d9d-c2ac-1178-5d0af89d728f}">
+        <p14:section name="JIJ NU ! — Oefeningen" id="{69c88f23-9e7d-6b43-acce-51107045401b}">
           <p14:sldIdLst>
             <p14:sldId id="272"/>
             <p14:sldId id="273"/>
@@ -181,7 +181,7 @@
             <p14:sldId id="284"/>
           </p14:sldIdLst>
         </p14:section>
-        <p14:section name="Clôture" id="{4c82b507-64f4-7d22-a2ea-3d17e9402507}">
+        <p14:section name="Clôture" id="{e1a63bed-f5c7-37e6-9fae-01c883338636}">
           <p14:sldIdLst>
             <p14:sldId id="285"/>
           </p14:sldIdLst>

--- a/neerlandais1/powerpoints/Module_31_De_keuken_in.pptx
+++ b/neerlandais1/powerpoints/Module_31_De_keuken_in.pptx
@@ -136,18 +136,18 @@
   <p:extLst>
     <p:ext uri="{521415D9-36F7-43E2-AB2F-B90AF26B5E84}">
       <p14:sectionLst xmlns:p14="http://schemas.microsoft.com/office/powerpoint/2010/main">
-        <p14:section name="Ouverture" id="{4f88ca8d-e334-7de4-ca5a-009a028dbd99}">
+        <p14:section name="Ouverture" id="{8e6698f8-888f-e757-d74c-dbef5363e2d3}">
           <p14:sldIdLst>
             <p14:sldId id="256"/>
           </p14:sldIdLst>
         </p14:section>
-        <p14:section name="Découvrir" id="{fb600aab-53eb-3a89-f76e-2084ab212b56}">
+        <p14:section name="Découvrir" id="{43ca1c17-5e26-e09d-4e2e-9a583c921adf}">
           <p14:sldIdLst>
             <p14:sldId id="257"/>
             <p14:sldId id="258"/>
           </p14:sldIdLst>
         </p14:section>
-        <p14:section name="Comprendre" id="{6521b9cc-ff1c-9e62-6131-00a104420005}">
+        <p14:section name="Comprendre" id="{321b2ebc-977b-2c05-54bd-8329222d1773}">
           <p14:sldIdLst>
             <p14:sldId id="259"/>
             <p14:sldId id="260"/>
@@ -164,7 +164,7 @@
             <p14:sldId id="271"/>
           </p14:sldIdLst>
         </p14:section>
-        <p14:section name="JIJ NU ! — Oefeningen" id="{69c88f23-9e7d-6b43-acce-51107045401b}">
+        <p14:section name="JIJ NU ! — Oefeningen" id="{b2c5ab36-863f-90a0-16a0-0c28f087ca47}">
           <p14:sldIdLst>
             <p14:sldId id="272"/>
             <p14:sldId id="273"/>
@@ -181,7 +181,7 @@
             <p14:sldId id="284"/>
           </p14:sldIdLst>
         </p14:section>
-        <p14:section name="Clôture" id="{e1a63bed-f5c7-37e6-9fae-01c883338636}">
+        <p14:section name="Clôture" id="{4ca4f94f-d910-caa3-e202-28e44432a9d7}">
           <p14:sldIdLst>
             <p14:sldId id="285"/>
           </p14:sldIdLst>

--- a/neerlandais1/powerpoints/Module_31_De_keuken_in.pptx
+++ b/neerlandais1/powerpoints/Module_31_De_keuken_in.pptx
@@ -136,18 +136,18 @@
   <p:extLst>
     <p:ext uri="{521415D9-36F7-43E2-AB2F-B90AF26B5E84}">
       <p14:sectionLst xmlns:p14="http://schemas.microsoft.com/office/powerpoint/2010/main">
-        <p14:section name="Ouverture" id="{8e6698f8-888f-e757-d74c-dbef5363e2d3}">
+        <p14:section name="Ouverture" id="{6118c39f-cbe3-db73-c5ff-784d39f480bd}">
           <p14:sldIdLst>
             <p14:sldId id="256"/>
           </p14:sldIdLst>
         </p14:section>
-        <p14:section name="Découvrir" id="{43ca1c17-5e26-e09d-4e2e-9a583c921adf}">
+        <p14:section name="Découvrir" id="{05857bd8-7237-e6ec-756e-78a8ee7788f5}">
           <p14:sldIdLst>
             <p14:sldId id="257"/>
             <p14:sldId id="258"/>
           </p14:sldIdLst>
         </p14:section>
-        <p14:section name="Comprendre" id="{321b2ebc-977b-2c05-54bd-8329222d1773}">
+        <p14:section name="Comprendre" id="{ca8ebc9a-b1ed-40ee-3593-450529486bdb}">
           <p14:sldIdLst>
             <p14:sldId id="259"/>
             <p14:sldId id="260"/>
@@ -164,7 +164,7 @@
             <p14:sldId id="271"/>
           </p14:sldIdLst>
         </p14:section>
-        <p14:section name="JIJ NU ! — Oefeningen" id="{b2c5ab36-863f-90a0-16a0-0c28f087ca47}">
+        <p14:section name="JIJ NU ! — Oefeningen" id="{10080b16-50f2-1be8-53a8-500d33b5e05f}">
           <p14:sldIdLst>
             <p14:sldId id="272"/>
             <p14:sldId id="273"/>
@@ -181,7 +181,7 @@
             <p14:sldId id="284"/>
           </p14:sldIdLst>
         </p14:section>
-        <p14:section name="Clôture" id="{4ca4f94f-d910-caa3-e202-28e44432a9d7}">
+        <p14:section name="Clôture" id="{42cdcce6-824f-5bb3-acd5-5a53933d1876}">
           <p14:sldIdLst>
             <p14:sldId id="285"/>
           </p14:sldIdLst>

--- a/neerlandais1/powerpoints/Module_31_De_keuken_in.pptx
+++ b/neerlandais1/powerpoints/Module_31_De_keuken_in.pptx
@@ -136,18 +136,18 @@
   <p:extLst>
     <p:ext uri="{521415D9-36F7-43E2-AB2F-B90AF26B5E84}">
       <p14:sectionLst xmlns:p14="http://schemas.microsoft.com/office/powerpoint/2010/main">
-        <p14:section name="Ouverture" id="{6118c39f-cbe3-db73-c5ff-784d39f480bd}">
+        <p14:section name="Ouverture" id="{6c8881f7-3631-bbb1-7c99-86e8cdaba107}">
           <p14:sldIdLst>
             <p14:sldId id="256"/>
           </p14:sldIdLst>
         </p14:section>
-        <p14:section name="Découvrir" id="{05857bd8-7237-e6ec-756e-78a8ee7788f5}">
+        <p14:section name="Découvrir" id="{7e950141-61f9-faa0-a133-b8d5c21e7091}">
           <p14:sldIdLst>
             <p14:sldId id="257"/>
             <p14:sldId id="258"/>
           </p14:sldIdLst>
         </p14:section>
-        <p14:section name="Comprendre" id="{ca8ebc9a-b1ed-40ee-3593-450529486bdb}">
+        <p14:section name="Comprendre" id="{11f730f8-3917-18f4-5e9c-5154881c0f81}">
           <p14:sldIdLst>
             <p14:sldId id="259"/>
             <p14:sldId id="260"/>
@@ -164,7 +164,7 @@
             <p14:sldId id="271"/>
           </p14:sldIdLst>
         </p14:section>
-        <p14:section name="JIJ NU ! — Oefeningen" id="{10080b16-50f2-1be8-53a8-500d33b5e05f}">
+        <p14:section name="JIJ NU ! — Oefeningen" id="{0d8f0a4c-349a-9916-f186-5e248b94e861}">
           <p14:sldIdLst>
             <p14:sldId id="272"/>
             <p14:sldId id="273"/>
@@ -181,7 +181,7 @@
             <p14:sldId id="284"/>
           </p14:sldIdLst>
         </p14:section>
-        <p14:section name="Clôture" id="{42cdcce6-824f-5bb3-acd5-5a53933d1876}">
+        <p14:section name="Clôture" id="{375e84fd-3883-737f-102b-b382eaa469ad}">
           <p14:sldIdLst>
             <p14:sldId id="285"/>
           </p14:sldIdLst>

--- a/neerlandais1/powerpoints/Module_31_De_keuken_in.pptx
+++ b/neerlandais1/powerpoints/Module_31_De_keuken_in.pptx
@@ -136,18 +136,18 @@
   <p:extLst>
     <p:ext uri="{521415D9-36F7-43E2-AB2F-B90AF26B5E84}">
       <p14:sectionLst xmlns:p14="http://schemas.microsoft.com/office/powerpoint/2010/main">
-        <p14:section name="Ouverture" id="{6c8881f7-3631-bbb1-7c99-86e8cdaba107}">
+        <p14:section name="Ouverture" id="{372be312-0280-111f-bb05-27d36249415e}">
           <p14:sldIdLst>
             <p14:sldId id="256"/>
           </p14:sldIdLst>
         </p14:section>
-        <p14:section name="Découvrir" id="{7e950141-61f9-faa0-a133-b8d5c21e7091}">
+        <p14:section name="Découvrir" id="{07987838-a71e-e9a3-0b71-af8dd802e7cc}">
           <p14:sldIdLst>
             <p14:sldId id="257"/>
             <p14:sldId id="258"/>
           </p14:sldIdLst>
         </p14:section>
-        <p14:section name="Comprendre" id="{11f730f8-3917-18f4-5e9c-5154881c0f81}">
+        <p14:section name="Comprendre" id="{5353d892-7d35-6822-2a71-56024f2a8338}">
           <p14:sldIdLst>
             <p14:sldId id="259"/>
             <p14:sldId id="260"/>
@@ -164,7 +164,7 @@
             <p14:sldId id="271"/>
           </p14:sldIdLst>
         </p14:section>
-        <p14:section name="JIJ NU ! — Oefeningen" id="{0d8f0a4c-349a-9916-f186-5e248b94e861}">
+        <p14:section name="JIJ NU ! — Oefeningen" id="{b599f4e7-99eb-34f1-525d-4239ad8eb8fd}">
           <p14:sldIdLst>
             <p14:sldId id="272"/>
             <p14:sldId id="273"/>
@@ -181,7 +181,7 @@
             <p14:sldId id="284"/>
           </p14:sldIdLst>
         </p14:section>
-        <p14:section name="Clôture" id="{375e84fd-3883-737f-102b-b382eaa469ad}">
+        <p14:section name="Clôture" id="{55848e5a-fc51-e7a1-6b49-2197879b8171}">
           <p14:sldIdLst>
             <p14:sldId id="285"/>
           </p14:sldIdLst>

--- a/neerlandais1/powerpoints/Module_31_De_keuken_in.pptx
+++ b/neerlandais1/powerpoints/Module_31_De_keuken_in.pptx
@@ -136,18 +136,18 @@
   <p:extLst>
     <p:ext uri="{521415D9-36F7-43E2-AB2F-B90AF26B5E84}">
       <p14:sectionLst xmlns:p14="http://schemas.microsoft.com/office/powerpoint/2010/main">
-        <p14:section name="Ouverture" id="{372be312-0280-111f-bb05-27d36249415e}">
+        <p14:section name="Ouverture" id="{875516f7-7da7-fc9c-f7e4-7454eefe8b11}">
           <p14:sldIdLst>
             <p14:sldId id="256"/>
           </p14:sldIdLst>
         </p14:section>
-        <p14:section name="Découvrir" id="{07987838-a71e-e9a3-0b71-af8dd802e7cc}">
+        <p14:section name="Découvrir" id="{233c1377-fe65-d69a-c82a-8e6a0b6acff6}">
           <p14:sldIdLst>
             <p14:sldId id="257"/>
             <p14:sldId id="258"/>
           </p14:sldIdLst>
         </p14:section>
-        <p14:section name="Comprendre" id="{5353d892-7d35-6822-2a71-56024f2a8338}">
+        <p14:section name="Comprendre" id="{1f4fc59d-b007-9236-2082-a0f322b9e4ac}">
           <p14:sldIdLst>
             <p14:sldId id="259"/>
             <p14:sldId id="260"/>
@@ -164,7 +164,7 @@
             <p14:sldId id="271"/>
           </p14:sldIdLst>
         </p14:section>
-        <p14:section name="JIJ NU ! — Oefeningen" id="{b599f4e7-99eb-34f1-525d-4239ad8eb8fd}">
+        <p14:section name="JIJ NU ! — Oefeningen" id="{8ccccae5-7e64-0e27-3217-79d8961a9fca}">
           <p14:sldIdLst>
             <p14:sldId id="272"/>
             <p14:sldId id="273"/>
@@ -181,7 +181,7 @@
             <p14:sldId id="284"/>
           </p14:sldIdLst>
         </p14:section>
-        <p14:section name="Clôture" id="{55848e5a-fc51-e7a1-6b49-2197879b8171}">
+        <p14:section name="Clôture" id="{3c2e27ce-91aa-e02a-57c8-e1a9d2f89b8c}">
           <p14:sldIdLst>
             <p14:sldId id="285"/>
           </p14:sldIdLst>
